--- a/classes/parte-9-forense-digital-y-respuesta-a-incidentes/217-analisis-de-causa-raiz/clase-217-presentacion.pptx
+++ b/classes/parte-9-forense-digital-y-respuesta-a-incidentes/217-analisis-de-causa-raiz/clase-217-presentacion.pptx
@@ -17,6 +17,11 @@
     <p:sldId id="265" r:id="rId16"/>
     <p:sldId id="266" r:id="rId17"/>
     <p:sldId id="267" r:id="rId18"/>
+    <p:sldId id="268" r:id="rId19"/>
+    <p:sldId id="269" r:id="rId20"/>
+    <p:sldId id="270" r:id="rId21"/>
+    <p:sldId id="271" r:id="rId22"/>
+    <p:sldId id="272" r:id="rId23"/>
   </p:sldIdLst>
   <p:sldSz cx="9144000" cy="6858000" type="screen4x3"/>
   <p:notesSz cx="6858000" cy="9144000"/>
@@ -3198,7 +3203,7 @@
                   <a:srgbClr val="0B3D2E"/>
                 </a:solidFill>
               </a:rPr>
-              <a:t>⚠️ Errores comunes</a:t>
+              <a:t>🧰 Herramientas y preparación</a:t>
             </a:r>
           </a:p>
         </p:txBody>
@@ -3236,67 +3241,37 @@
                   <a:srgbClr val="22282E"/>
                 </a:solidFill>
               </a:rPr>
-              <a:t>•  Arreglas el síntoma y recurre — Te quedaste en la causa próxima. Sigue preguntando "por qué".</a:t>
-            </a:r>
-          </a:p>
-          <a:p>
-            <a:pPr>
-              <a:spcAft>
-                <a:spcPts val="600"/>
-              </a:spcAft>
-            </a:pPr>
-            <a:r>
-              <a:rPr sz="1500">
-                <a:solidFill>
-                  <a:srgbClr val="22282E"/>
-                </a:solidFill>
-              </a:rPr>
-              <a:t>•  El análisis busca culpables — Cultura de culpa. Adopta el enfoque blameless.</a:t>
-            </a:r>
-          </a:p>
-          <a:p>
-            <a:pPr>
-              <a:spcAft>
-                <a:spcPts val="600"/>
-              </a:spcAft>
-            </a:pPr>
-            <a:r>
-              <a:rPr sz="1500">
-                <a:solidFill>
-                  <a:srgbClr val="22282E"/>
-                </a:solidFill>
-              </a:rPr>
-              <a:t>•  Acciones vagas ("mejorar seguridad") — No verificables. Hazlas concretas y medibles.</a:t>
-            </a:r>
-          </a:p>
-          <a:p>
-            <a:pPr>
-              <a:spcAft>
-                <a:spcPts val="600"/>
-              </a:spcAft>
-            </a:pPr>
-            <a:r>
-              <a:rPr sz="1500">
-                <a:solidFill>
-                  <a:srgbClr val="22282E"/>
-                </a:solidFill>
-              </a:rPr>
-              <a:t>•  Una sola causa asumida — Muchos incidentes tienen varias. Usa Ishikawa.</a:t>
-            </a:r>
-          </a:p>
-          <a:p>
-            <a:pPr>
-              <a:spcAft>
-                <a:spcPts val="600"/>
-              </a:spcAft>
-            </a:pPr>
-            <a:r>
-              <a:rPr sz="1500">
-                <a:solidFill>
-                  <a:srgbClr val="22282E"/>
-                </a:solidFill>
-              </a:rPr>
-              <a:t>•  No se implementan las acciones — Sin responsable/fecha. Asígnalos y da seguimiento.</a:t>
+              <a:t>•  Metodologías: plantilla de 5 Porqués, diagrama de Ishikawa, plantilla de post-mortem blameless.</a:t>
+            </a:r>
+          </a:p>
+          <a:p>
+            <a:pPr>
+              <a:spcAft>
+                <a:spcPts val="600"/>
+              </a:spcAft>
+            </a:pPr>
+            <a:r>
+              <a:rPr sz="1500">
+                <a:solidFill>
+                  <a:srgbClr val="22282E"/>
+                </a:solidFill>
+              </a:rPr>
+              <a:t>•  Insumos: la timeline (clase 209), los hallazgos forenses y el mapeo ATT&amp;CK del incidente.</a:t>
+            </a:r>
+          </a:p>
+          <a:p>
+            <a:pPr>
+              <a:spcAft>
+                <a:spcPts val="600"/>
+              </a:spcAft>
+            </a:pPr>
+            <a:r>
+              <a:rPr sz="1500">
+                <a:solidFill>
+                  <a:srgbClr val="22282E"/>
+                </a:solidFill>
+              </a:rPr>
+              <a:t>•  Ejercicio aplicado: análisis, no herramientas ofensivas.</a:t>
             </a:r>
           </a:p>
         </p:txBody>
@@ -3347,7 +3322,7 @@
                   <a:srgbClr val="0B3D2E"/>
                 </a:solidFill>
               </a:rPr>
-              <a:t>❓ Preguntas frecuentes</a:t>
+              <a:t>🧪 Laboratorio guiado</a:t>
             </a:r>
           </a:p>
         </p:txBody>
@@ -3385,97 +3360,97 @@
                   <a:srgbClr val="22282E"/>
                 </a:solidFill>
               </a:rPr>
-              <a:t>•  ❓ ¿Causa próxima o raíz?</a:t>
-            </a:r>
-          </a:p>
-          <a:p>
-            <a:pPr>
-              <a:spcAft>
-                <a:spcPts val="600"/>
-              </a:spcAft>
-            </a:pPr>
-            <a:r>
-              <a:rPr sz="1500">
-                <a:solidFill>
-                  <a:srgbClr val="22282E"/>
-                </a:solidFill>
-              </a:rPr>
-              <a:t>•  La próxima es el disparo inmediato; la raíz es la condición de fondo. Corrige la raíz para prevenir recurrencia.</a:t>
-            </a:r>
-          </a:p>
-          <a:p>
-            <a:pPr>
-              <a:spcAft>
-                <a:spcPts val="600"/>
-              </a:spcAft>
-            </a:pPr>
-            <a:r>
-              <a:rPr sz="1500">
-                <a:solidFill>
-                  <a:srgbClr val="22282E"/>
-                </a:solidFill>
-              </a:rPr>
-              <a:t>•  ❓ ¿Por qué blameless?</a:t>
-            </a:r>
-          </a:p>
-          <a:p>
-            <a:pPr>
-              <a:spcAft>
-                <a:spcPts val="600"/>
-              </a:spcAft>
-            </a:pPr>
-            <a:r>
-              <a:rPr sz="1500">
-                <a:solidFill>
-                  <a:srgbClr val="22282E"/>
-                </a:solidFill>
-              </a:rPr>
-              <a:t>•  Porque culpar oculta la verdad. Un análisis sin culpa obtiene información honesta y mejora el sistema, no castiga a la persona.</a:t>
-            </a:r>
-          </a:p>
-          <a:p>
-            <a:pPr>
-              <a:spcAft>
-                <a:spcPts val="600"/>
-              </a:spcAft>
-            </a:pPr>
-            <a:r>
-              <a:rPr sz="1500">
-                <a:solidFill>
-                  <a:srgbClr val="22282E"/>
-                </a:solidFill>
-              </a:rPr>
-              <a:t>•  ❓ ¿5 Porqués o Ishikawa?</a:t>
-            </a:r>
-          </a:p>
-          <a:p>
-            <a:pPr>
-              <a:spcAft>
-                <a:spcPts val="600"/>
-              </a:spcAft>
-            </a:pPr>
-            <a:r>
-              <a:rPr sz="1500">
-                <a:solidFill>
-                  <a:srgbClr val="22282E"/>
-                </a:solidFill>
-              </a:rPr>
-              <a:t>•  5 Porqués para causas lineales; Ishikawa cuando hay múltiples factores por categoría. A menudo se combinan.</a:t>
-            </a:r>
-          </a:p>
-          <a:p>
-            <a:pPr>
-              <a:spcAft>
-                <a:spcPts val="600"/>
-              </a:spcAft>
-            </a:pPr>
-            <a:r>
-              <a:rPr sz="1500">
-                <a:solidFill>
-                  <a:srgbClr val="22282E"/>
-                </a:solidFill>
-              </a:rPr>
-              <a:t>•  ❓ ¿Para qué sirven MTTD/MTTR?</a:t>
+              <a:t>•  Reúne los hechos: timeline, IOCs, artefactos y el mapeo ATT&amp;CK del ataque.</a:t>
+            </a:r>
+          </a:p>
+          <a:p>
+            <a:pPr>
+              <a:spcAft>
+                <a:spcPts val="600"/>
+              </a:spcAft>
+            </a:pPr>
+            <a:r>
+              <a:rPr sz="1500">
+                <a:solidFill>
+                  <a:srgbClr val="22282E"/>
+                </a:solidFill>
+              </a:rPr>
+              <a:t>•  Aplica los 5 Porqués partiendo del impacto. Ejemplo:</a:t>
+            </a:r>
+          </a:p>
+          <a:p>
+            <a:pPr>
+              <a:spcAft>
+                <a:spcPts val="600"/>
+              </a:spcAft>
+            </a:pPr>
+            <a:r>
+              <a:rPr sz="1500">
+                <a:solidFill>
+                  <a:srgbClr val="22282E"/>
+                </a:solidFill>
+              </a:rPr>
+              <a:t>•  ¿Por qué se cifraron los archivos? → Se ejecutó ransomware.</a:t>
+            </a:r>
+          </a:p>
+          <a:p>
+            <a:pPr>
+              <a:spcAft>
+                <a:spcPts val="600"/>
+              </a:spcAft>
+            </a:pPr>
+            <a:r>
+              <a:rPr sz="1500">
+                <a:solidFill>
+                  <a:srgbClr val="22282E"/>
+                </a:solidFill>
+              </a:rPr>
+              <a:t>•  ¿Por qué se ejecutó? → Un usuario abrió un adjunto con macro.</a:t>
+            </a:r>
+          </a:p>
+          <a:p>
+            <a:pPr>
+              <a:spcAft>
+                <a:spcPts val="600"/>
+              </a:spcAft>
+            </a:pPr>
+            <a:r>
+              <a:rPr sz="1500">
+                <a:solidFill>
+                  <a:srgbClr val="22282E"/>
+                </a:solidFill>
+              </a:rPr>
+              <a:t>•  ¿Por qué la macro corrió? → Las macros no estaban bloqueadas por política.</a:t>
+            </a:r>
+          </a:p>
+          <a:p>
+            <a:pPr>
+              <a:spcAft>
+                <a:spcPts val="600"/>
+              </a:spcAft>
+            </a:pPr>
+            <a:r>
+              <a:rPr sz="1500">
+                <a:solidFill>
+                  <a:srgbClr val="22282E"/>
+                </a:solidFill>
+              </a:rPr>
+              <a:t>•  ¿Por qué llegó el correo? → El gateway no filtró el adjunto.</a:t>
+            </a:r>
+          </a:p>
+          <a:p>
+            <a:pPr>
+              <a:spcAft>
+                <a:spcPts val="600"/>
+              </a:spcAft>
+            </a:pPr>
+            <a:r>
+              <a:rPr sz="1500">
+                <a:solidFill>
+                  <a:srgbClr val="22282E"/>
+                </a:solidFill>
+              </a:rPr>
+              <a:t>•  ¿Por qué escaló a red? → La cuenta tenía privilegios excesivos.</a:t>
             </a:r>
           </a:p>
         </p:txBody>
@@ -3526,7 +3501,7 @@
                   <a:srgbClr val="0B3D2E"/>
                 </a:solidFill>
               </a:rPr>
-              <a:t>🔗 Referencias</a:t>
+              <a:t>✍️ Ejercicios</a:t>
             </a:r>
           </a:p>
         </p:txBody>
@@ -3564,56 +3539,727 @@
                   <a:srgbClr val="22282E"/>
                 </a:solidFill>
               </a:rPr>
-              <a:t>•  NIST SP 800-61 Rev. 2 (Lessons Learned): &lt;https://csrc.nist.gov/publications/detail/sp/800-61/rev-2/final&gt;</a:t>
-            </a:r>
-          </a:p>
-          <a:p>
-            <a:pPr>
-              <a:spcAft>
-                <a:spcPts val="600"/>
-              </a:spcAft>
-            </a:pPr>
-            <a:r>
-              <a:rPr sz="1500">
-                <a:solidFill>
-                  <a:srgbClr val="22282E"/>
-                </a:solidFill>
-              </a:rPr>
-              <a:t>•  Lockheed Martin — Cyber Kill Chain: &lt;https://www.lockheedmartin.com/en-us/capabilities/cyber/cyber-kill-chain.html&gt;</a:t>
-            </a:r>
-          </a:p>
-          <a:p>
-            <a:pPr>
-              <a:spcAft>
-                <a:spcPts val="600"/>
-              </a:spcAft>
-            </a:pPr>
-            <a:r>
-              <a:rPr sz="1500">
-                <a:solidFill>
-                  <a:srgbClr val="22282E"/>
-                </a:solidFill>
-              </a:rPr>
-              <a:t>•  Google SRE — Postmortem Culture: &lt;https://sre.google/sre-book/postmortem-culture/&gt;</a:t>
-            </a:r>
-          </a:p>
-          <a:p>
-            <a:pPr>
-              <a:spcAft>
-                <a:spcPts val="600"/>
-              </a:spcAft>
-            </a:pPr>
-            <a:r>
-              <a:rPr sz="1500">
-                <a:solidFill>
-                  <a:srgbClr val="22282E"/>
-                </a:solidFill>
-              </a:rPr>
-              <a:t>•  MITRE ATT&amp;CK: &lt;https://attack.mitre.org/&gt;</a:t>
-            </a:r>
-          </a:p>
-        </p:txBody>
-      </p:sp>
+              <a:t>•  Aplica los 5 Porqués a un caso de phishing.</a:t>
+            </a:r>
+          </a:p>
+          <a:p>
+            <a:pPr>
+              <a:spcAft>
+                <a:spcPts val="600"/>
+              </a:spcAft>
+            </a:pPr>
+            <a:r>
+              <a:rPr sz="1500">
+                <a:solidFill>
+                  <a:srgbClr val="22282E"/>
+                </a:solidFill>
+              </a:rPr>
+              <a:t>•  Construye un Ishikawa con cuatro categorías de causa.</a:t>
+            </a:r>
+          </a:p>
+          <a:p>
+            <a:pPr>
+              <a:spcAft>
+                <a:spcPts val="600"/>
+              </a:spcAft>
+            </a:pPr>
+            <a:r>
+              <a:rPr sz="1500">
+                <a:solidFill>
+                  <a:srgbClr val="22282E"/>
+                </a:solidFill>
+              </a:rPr>
+              <a:t>•  Distingue causa próxima y raíz en tres incidentes distintos.</a:t>
+            </a:r>
+          </a:p>
+          <a:p>
+            <a:pPr>
+              <a:spcAft>
+                <a:spcPts val="600"/>
+              </a:spcAft>
+            </a:pPr>
+            <a:r>
+              <a:rPr sz="1500">
+                <a:solidFill>
+                  <a:srgbClr val="22282E"/>
+                </a:solidFill>
+              </a:rPr>
+              <a:t>•  Formula tres acciones correctivas verificables.</a:t>
+            </a:r>
+          </a:p>
+          <a:p>
+            <a:pPr>
+              <a:spcAft>
+                <a:spcPts val="600"/>
+              </a:spcAft>
+            </a:pPr>
+            <a:r>
+              <a:rPr sz="1500">
+                <a:solidFill>
+                  <a:srgbClr val="22282E"/>
+                </a:solidFill>
+              </a:rPr>
+              <a:t>•  Calcula MTTD y MTTR de una timeline dada.</a:t>
+            </a:r>
+          </a:p>
+          <a:p>
+            <a:pPr>
+              <a:spcAft>
+                <a:spcPts val="600"/>
+              </a:spcAft>
+            </a:pPr>
+            <a:r>
+              <a:rPr sz="1500">
+                <a:solidFill>
+                  <a:srgbClr val="22282E"/>
+                </a:solidFill>
+              </a:rPr>
+              <a:t>•  Reescribe un post-mortem con culpas en versión blameless.</a:t>
+            </a:r>
+          </a:p>
+        </p:txBody>
+      </p:sp>
+    </p:spTree>
+  </p:cSld>
+  <p:clrMapOvr>
+    <a:masterClrMapping/>
+  </p:clrMapOvr>
+</p:sld>
+</file>
+
+<file path=ppt/slides/slide13.xml><?xml version="1.0" encoding="utf-8"?>
+<p:sld xmlns:a="http://schemas.openxmlformats.org/drawingml/2006/main" xmlns:p="http://schemas.openxmlformats.org/presentationml/2006/main" xmlns:r="http://schemas.openxmlformats.org/officeDocument/2006/relationships">
+  <p:cSld>
+    <p:spTree>
+      <p:nvGrpSpPr>
+        <p:cNvPr id="1" name=""/>
+        <p:cNvGrpSpPr/>
+        <p:nvPr/>
+      </p:nvGrpSpPr>
+      <p:grpSpPr/>
+      <p:sp>
+        <p:nvSpPr>
+          <p:cNvPr id="2" name="TextBox 1"/>
+          <p:cNvSpPr txBox="1"/>
+          <p:nvPr/>
+        </p:nvSpPr>
+        <p:spPr>
+          <a:xfrm>
+            <a:off x="457200" y="320040"/>
+            <a:ext cx="8229600" cy="822960"/>
+          </a:xfrm>
+          <a:prstGeom prst="rect">
+            <a:avLst/>
+          </a:prstGeom>
+          <a:noFill/>
+        </p:spPr>
+        <p:txBody>
+          <a:bodyPr wrap="square">
+            <a:spAutoFit/>
+          </a:bodyPr>
+          <a:lstStyle/>
+          <a:p>
+            <a:r>
+              <a:rPr sz="2600" b="1">
+                <a:solidFill>
+                  <a:srgbClr val="0B3D2E"/>
+                </a:solidFill>
+              </a:rPr>
+              <a:t>📝 Reto verificable</a:t>
+            </a:r>
+          </a:p>
+        </p:txBody>
+      </p:sp>
+      <p:sp>
+        <p:nvSpPr>
+          <p:cNvPr id="3" name="TextBox 2"/>
+          <p:cNvSpPr txBox="1"/>
+          <p:nvPr/>
+        </p:nvSpPr>
+        <p:spPr>
+          <a:xfrm>
+            <a:off x="457200" y="1280160"/>
+            <a:ext cx="8229600" cy="4937760"/>
+          </a:xfrm>
+          <a:prstGeom prst="rect">
+            <a:avLst/>
+          </a:prstGeom>
+          <a:noFill/>
+        </p:spPr>
+        <p:txBody>
+          <a:bodyPr wrap="square">
+            <a:spAutoFit/>
+          </a:bodyPr>
+          <a:lstStyle/>
+          <a:p>
+            <a:pPr>
+              <a:spcAft>
+                <a:spcPts val="600"/>
+              </a:spcAft>
+            </a:pPr>
+            <a:r>
+              <a:rPr sz="1500">
+                <a:solidFill>
+                  <a:srgbClr val="22282E"/>
+                </a:solidFill>
+              </a:rPr>
+              <a:t>•  Realiza el análisis de causa raíz completo de un incidente que investigaste, entregando el árbol de 5 Porqués, el Ishikawa, la kill chain, y al menos tres acciones correctivas que ataquen causas raíz…</a:t>
+            </a:r>
+          </a:p>
+          <a:p>
+            <a:pPr>
+              <a:spcAft>
+                <a:spcPts val="600"/>
+              </a:spcAft>
+            </a:pPr>
+            <a:r>
+              <a:rPr sz="1500">
+                <a:solidFill>
+                  <a:srgbClr val="22282E"/>
+                </a:solidFill>
+              </a:rPr>
+              <a:t>•  Criterio de aceptación: cada acción correctiva ataca una causa raíz identificada (no un síntoma), tiene responsable, fecha y una forma objetiva de verificar que se implementó. El post-mortem no…</a:t>
+            </a:r>
+          </a:p>
+        </p:txBody>
+      </p:sp>
+    </p:spTree>
+  </p:cSld>
+  <p:clrMapOvr>
+    <a:masterClrMapping/>
+  </p:clrMapOvr>
+</p:sld>
+</file>
+
+<file path=ppt/slides/slide14.xml><?xml version="1.0" encoding="utf-8"?>
+<p:sld xmlns:a="http://schemas.openxmlformats.org/drawingml/2006/main" xmlns:p="http://schemas.openxmlformats.org/presentationml/2006/main" xmlns:r="http://schemas.openxmlformats.org/officeDocument/2006/relationships">
+  <p:cSld>
+    <p:spTree>
+      <p:nvGrpSpPr>
+        <p:cNvPr id="1" name=""/>
+        <p:cNvGrpSpPr/>
+        <p:nvPr/>
+      </p:nvGrpSpPr>
+      <p:grpSpPr/>
+      <p:sp>
+        <p:nvSpPr>
+          <p:cNvPr id="2" name="TextBox 1"/>
+          <p:cNvSpPr txBox="1"/>
+          <p:nvPr/>
+        </p:nvSpPr>
+        <p:spPr>
+          <a:xfrm>
+            <a:off x="457200" y="320040"/>
+            <a:ext cx="8229600" cy="822960"/>
+          </a:xfrm>
+          <a:prstGeom prst="rect">
+            <a:avLst/>
+          </a:prstGeom>
+          <a:noFill/>
+        </p:spPr>
+        <p:txBody>
+          <a:bodyPr wrap="square">
+            <a:spAutoFit/>
+          </a:bodyPr>
+          <a:lstStyle/>
+          <a:p>
+            <a:r>
+              <a:rPr sz="2600" b="1">
+                <a:solidFill>
+                  <a:srgbClr val="0B3D2E"/>
+                </a:solidFill>
+              </a:rPr>
+              <a:t>⚠️ Errores comunes</a:t>
+            </a:r>
+          </a:p>
+        </p:txBody>
+      </p:sp>
+      <p:sp>
+        <p:nvSpPr>
+          <p:cNvPr id="3" name="TextBox 2"/>
+          <p:cNvSpPr txBox="1"/>
+          <p:nvPr/>
+        </p:nvSpPr>
+        <p:spPr>
+          <a:xfrm>
+            <a:off x="457200" y="1280160"/>
+            <a:ext cx="8229600" cy="4937760"/>
+          </a:xfrm>
+          <a:prstGeom prst="rect">
+            <a:avLst/>
+          </a:prstGeom>
+          <a:noFill/>
+        </p:spPr>
+        <p:txBody>
+          <a:bodyPr wrap="square">
+            <a:spAutoFit/>
+          </a:bodyPr>
+          <a:lstStyle/>
+          <a:p>
+            <a:pPr>
+              <a:spcAft>
+                <a:spcPts val="600"/>
+              </a:spcAft>
+            </a:pPr>
+            <a:r>
+              <a:rPr sz="1500">
+                <a:solidFill>
+                  <a:srgbClr val="22282E"/>
+                </a:solidFill>
+              </a:rPr>
+              <a:t>•  Arreglas el síntoma y recurre — Te quedaste en la causa próxima. Sigue preguntando "por qué".</a:t>
+            </a:r>
+          </a:p>
+          <a:p>
+            <a:pPr>
+              <a:spcAft>
+                <a:spcPts val="600"/>
+              </a:spcAft>
+            </a:pPr>
+            <a:r>
+              <a:rPr sz="1500">
+                <a:solidFill>
+                  <a:srgbClr val="22282E"/>
+                </a:solidFill>
+              </a:rPr>
+              <a:t>•  El análisis busca culpables — Cultura de culpa. Adopta el enfoque blameless.</a:t>
+            </a:r>
+          </a:p>
+          <a:p>
+            <a:pPr>
+              <a:spcAft>
+                <a:spcPts val="600"/>
+              </a:spcAft>
+            </a:pPr>
+            <a:r>
+              <a:rPr sz="1500">
+                <a:solidFill>
+                  <a:srgbClr val="22282E"/>
+                </a:solidFill>
+              </a:rPr>
+              <a:t>•  Acciones vagas ("mejorar seguridad") — No verificables. Hazlas concretas y medibles.</a:t>
+            </a:r>
+          </a:p>
+          <a:p>
+            <a:pPr>
+              <a:spcAft>
+                <a:spcPts val="600"/>
+              </a:spcAft>
+            </a:pPr>
+            <a:r>
+              <a:rPr sz="1500">
+                <a:solidFill>
+                  <a:srgbClr val="22282E"/>
+                </a:solidFill>
+              </a:rPr>
+              <a:t>•  Una sola causa asumida — Muchos incidentes tienen varias. Usa Ishikawa.</a:t>
+            </a:r>
+          </a:p>
+          <a:p>
+            <a:pPr>
+              <a:spcAft>
+                <a:spcPts val="600"/>
+              </a:spcAft>
+            </a:pPr>
+            <a:r>
+              <a:rPr sz="1500">
+                <a:solidFill>
+                  <a:srgbClr val="22282E"/>
+                </a:solidFill>
+              </a:rPr>
+              <a:t>•  No se implementan las acciones — Sin responsable/fecha. Asígnalos y da seguimiento.</a:t>
+            </a:r>
+          </a:p>
+        </p:txBody>
+      </p:sp>
+    </p:spTree>
+  </p:cSld>
+  <p:clrMapOvr>
+    <a:masterClrMapping/>
+  </p:clrMapOvr>
+</p:sld>
+</file>
+
+<file path=ppt/slides/slide15.xml><?xml version="1.0" encoding="utf-8"?>
+<p:sld xmlns:a="http://schemas.openxmlformats.org/drawingml/2006/main" xmlns:p="http://schemas.openxmlformats.org/presentationml/2006/main" xmlns:r="http://schemas.openxmlformats.org/officeDocument/2006/relationships">
+  <p:cSld>
+    <p:spTree>
+      <p:nvGrpSpPr>
+        <p:cNvPr id="1" name=""/>
+        <p:cNvGrpSpPr/>
+        <p:nvPr/>
+      </p:nvGrpSpPr>
+      <p:grpSpPr/>
+      <p:sp>
+        <p:nvSpPr>
+          <p:cNvPr id="2" name="TextBox 1"/>
+          <p:cNvSpPr txBox="1"/>
+          <p:nvPr/>
+        </p:nvSpPr>
+        <p:spPr>
+          <a:xfrm>
+            <a:off x="457200" y="320040"/>
+            <a:ext cx="8229600" cy="822960"/>
+          </a:xfrm>
+          <a:prstGeom prst="rect">
+            <a:avLst/>
+          </a:prstGeom>
+          <a:noFill/>
+        </p:spPr>
+        <p:txBody>
+          <a:bodyPr wrap="square">
+            <a:spAutoFit/>
+          </a:bodyPr>
+          <a:lstStyle/>
+          <a:p>
+            <a:r>
+              <a:rPr sz="2600" b="1">
+                <a:solidFill>
+                  <a:srgbClr val="0B3D2E"/>
+                </a:solidFill>
+              </a:rPr>
+              <a:t>❓ Preguntas frecuentes</a:t>
+            </a:r>
+          </a:p>
+        </p:txBody>
+      </p:sp>
+      <p:sp>
+        <p:nvSpPr>
+          <p:cNvPr id="3" name="TextBox 2"/>
+          <p:cNvSpPr txBox="1"/>
+          <p:nvPr/>
+        </p:nvSpPr>
+        <p:spPr>
+          <a:xfrm>
+            <a:off x="457200" y="1280160"/>
+            <a:ext cx="8229600" cy="4937760"/>
+          </a:xfrm>
+          <a:prstGeom prst="rect">
+            <a:avLst/>
+          </a:prstGeom>
+          <a:noFill/>
+        </p:spPr>
+        <p:txBody>
+          <a:bodyPr wrap="square">
+            <a:spAutoFit/>
+          </a:bodyPr>
+          <a:lstStyle/>
+          <a:p>
+            <a:pPr>
+              <a:spcAft>
+                <a:spcPts val="600"/>
+              </a:spcAft>
+            </a:pPr>
+            <a:r>
+              <a:rPr sz="1500">
+                <a:solidFill>
+                  <a:srgbClr val="22282E"/>
+                </a:solidFill>
+              </a:rPr>
+              <a:t>•  ❓ ¿Causa próxima o raíz?</a:t>
+            </a:r>
+          </a:p>
+          <a:p>
+            <a:pPr>
+              <a:spcAft>
+                <a:spcPts val="600"/>
+              </a:spcAft>
+            </a:pPr>
+            <a:r>
+              <a:rPr sz="1500">
+                <a:solidFill>
+                  <a:srgbClr val="22282E"/>
+                </a:solidFill>
+              </a:rPr>
+              <a:t>•  La próxima es el disparo inmediato; la raíz es la condición de fondo. Corrige la raíz para prevenir recurrencia.</a:t>
+            </a:r>
+          </a:p>
+          <a:p>
+            <a:pPr>
+              <a:spcAft>
+                <a:spcPts val="600"/>
+              </a:spcAft>
+            </a:pPr>
+            <a:r>
+              <a:rPr sz="1500">
+                <a:solidFill>
+                  <a:srgbClr val="22282E"/>
+                </a:solidFill>
+              </a:rPr>
+              <a:t>•  ❓ ¿Por qué blameless?</a:t>
+            </a:r>
+          </a:p>
+          <a:p>
+            <a:pPr>
+              <a:spcAft>
+                <a:spcPts val="600"/>
+              </a:spcAft>
+            </a:pPr>
+            <a:r>
+              <a:rPr sz="1500">
+                <a:solidFill>
+                  <a:srgbClr val="22282E"/>
+                </a:solidFill>
+              </a:rPr>
+              <a:t>•  Porque culpar oculta la verdad. Un análisis sin culpa obtiene información honesta y mejora el sistema, no castiga a la persona.</a:t>
+            </a:r>
+          </a:p>
+          <a:p>
+            <a:pPr>
+              <a:spcAft>
+                <a:spcPts val="600"/>
+              </a:spcAft>
+            </a:pPr>
+            <a:r>
+              <a:rPr sz="1500">
+                <a:solidFill>
+                  <a:srgbClr val="22282E"/>
+                </a:solidFill>
+              </a:rPr>
+              <a:t>•  ❓ ¿5 Porqués o Ishikawa?</a:t>
+            </a:r>
+          </a:p>
+          <a:p>
+            <a:pPr>
+              <a:spcAft>
+                <a:spcPts val="600"/>
+              </a:spcAft>
+            </a:pPr>
+            <a:r>
+              <a:rPr sz="1500">
+                <a:solidFill>
+                  <a:srgbClr val="22282E"/>
+                </a:solidFill>
+              </a:rPr>
+              <a:t>•  5 Porqués para causas lineales; Ishikawa cuando hay múltiples factores por categoría. A menudo se combinan.</a:t>
+            </a:r>
+          </a:p>
+          <a:p>
+            <a:pPr>
+              <a:spcAft>
+                <a:spcPts val="600"/>
+              </a:spcAft>
+            </a:pPr>
+            <a:r>
+              <a:rPr sz="1500">
+                <a:solidFill>
+                  <a:srgbClr val="22282E"/>
+                </a:solidFill>
+              </a:rPr>
+              <a:t>•  ❓ ¿Para qué sirven MTTD/MTTR?</a:t>
+            </a:r>
+          </a:p>
+        </p:txBody>
+      </p:sp>
+    </p:spTree>
+  </p:cSld>
+  <p:clrMapOvr>
+    <a:masterClrMapping/>
+  </p:clrMapOvr>
+</p:sld>
+</file>
+
+<file path=ppt/slides/slide16.xml><?xml version="1.0" encoding="utf-8"?>
+<p:sld xmlns:a="http://schemas.openxmlformats.org/drawingml/2006/main" xmlns:p="http://schemas.openxmlformats.org/presentationml/2006/main" xmlns:r="http://schemas.openxmlformats.org/officeDocument/2006/relationships">
+  <p:cSld>
+    <p:spTree>
+      <p:nvGrpSpPr>
+        <p:cNvPr id="1" name=""/>
+        <p:cNvGrpSpPr/>
+        <p:nvPr/>
+      </p:nvGrpSpPr>
+      <p:grpSpPr/>
+      <p:sp>
+        <p:nvSpPr>
+          <p:cNvPr id="2" name="TextBox 1"/>
+          <p:cNvSpPr txBox="1"/>
+          <p:nvPr/>
+        </p:nvSpPr>
+        <p:spPr>
+          <a:xfrm>
+            <a:off x="457200" y="320040"/>
+            <a:ext cx="8229600" cy="822960"/>
+          </a:xfrm>
+          <a:prstGeom prst="rect">
+            <a:avLst/>
+          </a:prstGeom>
+          <a:noFill/>
+        </p:spPr>
+        <p:txBody>
+          <a:bodyPr wrap="square">
+            <a:spAutoFit/>
+          </a:bodyPr>
+          <a:lstStyle/>
+          <a:p>
+            <a:r>
+              <a:rPr sz="2600" b="1">
+                <a:solidFill>
+                  <a:srgbClr val="0B3D2E"/>
+                </a:solidFill>
+              </a:rPr>
+              <a:t>🔗 Referencias verificables y alcance</a:t>
+            </a:r>
+          </a:p>
+        </p:txBody>
+      </p:sp>
+      <p:sp>
+        <p:nvSpPr>
+          <p:cNvPr id="3" name="TextBox 2"/>
+          <p:cNvSpPr txBox="1"/>
+          <p:nvPr/>
+        </p:nvSpPr>
+        <p:spPr>
+          <a:xfrm>
+            <a:off x="457200" y="1280160"/>
+            <a:ext cx="8229600" cy="4937760"/>
+          </a:xfrm>
+          <a:prstGeom prst="rect">
+            <a:avLst/>
+          </a:prstGeom>
+          <a:noFill/>
+        </p:spPr>
+        <p:txBody>
+          <a:bodyPr wrap="square">
+            <a:spAutoFit/>
+          </a:bodyPr>
+          <a:lstStyle/>
+          <a:p>
+            <a:pPr>
+              <a:spcAft>
+                <a:spcPts val="600"/>
+              </a:spcAft>
+            </a:pPr>
+            <a:r>
+              <a:rPr sz="1500">
+                <a:solidFill>
+                  <a:srgbClr val="22282E"/>
+                </a:solidFill>
+              </a:rPr>
+              <a:t>•  NIST SP 800-61 Rev. 3: &lt;https://doi.org/10.6028/NIST.SP.800-61r3&gt; — vincula aprendizaje de incidentes, mejora continua y gestión de riesgo en CSF 2.0.</a:t>
+            </a:r>
+          </a:p>
+          <a:p>
+            <a:pPr>
+              <a:spcAft>
+                <a:spcPts val="600"/>
+              </a:spcAft>
+            </a:pPr>
+            <a:r>
+              <a:rPr sz="1500">
+                <a:solidFill>
+                  <a:srgbClr val="22282E"/>
+                </a:solidFill>
+              </a:rPr>
+              <a:t>•  Google SRE — Postmortem Culture: &lt;https://sre.google/sre-book/postmortem-culture/&gt; — práctica publicada para postmortems orientados al aprendizaje; debe adaptarse a obligaciones laborales y…</a:t>
+            </a:r>
+          </a:p>
+          <a:p>
+            <a:pPr>
+              <a:spcAft>
+                <a:spcPts val="600"/>
+              </a:spcAft>
+            </a:pPr>
+            <a:r>
+              <a:rPr sz="1500">
+                <a:solidFill>
+                  <a:srgbClr val="22282E"/>
+                </a:solidFill>
+              </a:rPr>
+              <a:t>•  MITRE ATT&amp;CK: &lt;https://attack.mitre.org/&gt; — vocabulario para reconstruir comportamientos; no constituye por sí mismo un análisis causal organizacional.</a:t>
+            </a:r>
+          </a:p>
+          <a:p>
+            <a:pPr>
+              <a:spcAft>
+                <a:spcPts val="600"/>
+              </a:spcAft>
+            </a:pPr>
+            <a:r>
+              <a:rPr sz="1500">
+                <a:solidFill>
+                  <a:srgbClr val="22282E"/>
+                </a:solidFill>
+              </a:rPr>
+              <a:t>•  NIST Cybersecurity Framework 2.0: &lt;https://www.nist.gov/cyberframework&gt; — marco oficial para relacionar hallazgos con gobierno, identificación, protección, detección, respuesta y recuperación.</a:t>
+            </a:r>
+          </a:p>
+        </p:txBody>
+      </p:sp>
+    </p:spTree>
+  </p:cSld>
+  <p:clrMapOvr>
+    <a:masterClrMapping/>
+  </p:clrMapOvr>
+</p:sld>
+</file>
+
+<file path=ppt/slides/slide17.xml><?xml version="1.0" encoding="utf-8"?>
+<p:sld xmlns:a="http://schemas.openxmlformats.org/drawingml/2006/main" xmlns:p="http://schemas.openxmlformats.org/presentationml/2006/main" xmlns:r="http://schemas.openxmlformats.org/officeDocument/2006/relationships">
+  <p:cSld>
+    <p:spTree>
+      <p:nvGrpSpPr>
+        <p:cNvPr id="1" name=""/>
+        <p:cNvGrpSpPr/>
+        <p:nvPr/>
+      </p:nvGrpSpPr>
+      <p:grpSpPr/>
+      <p:sp>
+        <p:nvSpPr>
+          <p:cNvPr id="2" name="TextBox 1"/>
+          <p:cNvSpPr txBox="1"/>
+          <p:nvPr/>
+        </p:nvSpPr>
+        <p:spPr>
+          <a:xfrm>
+            <a:off x="457200" y="274320"/>
+            <a:ext cx="8229600" cy="640080"/>
+          </a:xfrm>
+          <a:prstGeom prst="rect">
+            <a:avLst/>
+          </a:prstGeom>
+          <a:noFill/>
+        </p:spPr>
+        <p:txBody>
+          <a:bodyPr wrap="square">
+            <a:spAutoFit/>
+          </a:bodyPr>
+          <a:lstStyle/>
+          <a:p>
+            <a:r>
+              <a:rPr sz="2200" b="1">
+                <a:solidFill>
+                  <a:srgbClr val="0B3D2E"/>
+                </a:solidFill>
+              </a:rPr>
+              <a:t>Diagrama de la clase</a:t>
+            </a:r>
+          </a:p>
+        </p:txBody>
+      </p:sp>
+      <p:pic>
+        <p:nvPicPr>
+          <p:cNvPr id="3" name="Picture 2" descr="ad02edf9d96eea52.png"/>
+          <p:cNvPicPr>
+            <a:picLocks noChangeAspect="1"/>
+          </p:cNvPicPr>
+          <p:nvPr/>
+        </p:nvPicPr>
+        <p:blipFill>
+          <a:blip r:embed="rId2"/>
+          <a:stretch>
+            <a:fillRect/>
+          </a:stretch>
+        </p:blipFill>
+        <p:spPr>
+          <a:xfrm>
+            <a:off x="3616536" y="1097280"/>
+            <a:ext cx="1910928" cy="5303520"/>
+          </a:xfrm>
+          <a:prstGeom prst="rect">
+            <a:avLst/>
+          </a:prstGeom>
+        </p:spPr>
+      </p:pic>
     </p:spTree>
   </p:cSld>
   <p:clrMapOvr>
@@ -3698,7 +4344,7 @@
                   <a:srgbClr val="22282E"/>
                 </a:solidFill>
               </a:rPr>
-              <a:t>•  Aprender a determinar la causa raíz de un incidente —no solo el síntoma— usando metodologías como los 5 Porqués, el diagrama de Ishikawa y la reconstrucción de la cadena de ataque (kill chain). Al terminar sabrás distinguir causa próxima de causa raíz y proponer acciones correctivas que eviten la recurrencia.</a:t>
+              <a:t>•  Aprender a determinar la causa raíz de un incidente —no solo el síntoma— usando metodologías como los 5 Porqués, el diagrama de Ishikawa y la reconstrucción de la cadena de ataque (kill chain). Al…</a:t>
             </a:r>
           </a:p>
         </p:txBody>
@@ -3996,7 +4642,7 @@
                   <a:srgbClr val="22282E"/>
                 </a:solidFill>
               </a:rPr>
-              <a:t>•  4 — Reconstrucción de kill chain</a:t>
+              <a:t>•  4 — Reconstrucción de secuencia de ataque</a:t>
             </a:r>
           </a:p>
           <a:p>
@@ -4092,7 +4738,7 @@
                   <a:srgbClr val="0B3D2E"/>
                 </a:solidFill>
               </a:rPr>
-              <a:t>📖 Definiciones y características</a:t>
+              <a:t>🧠 Explicación en profundidad</a:t>
             </a:r>
           </a:p>
         </p:txBody>
@@ -4130,97 +4776,97 @@
                   <a:srgbClr val="22282E"/>
                 </a:solidFill>
               </a:rPr>
-              <a:t>•  Causa próxima: el evento inmediato que produjo el daño (p. ej. "se ejecutó el macro"). Característica: visible pero superficial.</a:t>
-            </a:r>
-          </a:p>
-          <a:p>
-            <a:pPr>
-              <a:spcAft>
-                <a:spcPts val="600"/>
-              </a:spcAft>
-            </a:pPr>
-            <a:r>
-              <a:rPr sz="1500">
-                <a:solidFill>
-                  <a:srgbClr val="22282E"/>
-                </a:solidFill>
-              </a:rPr>
-              <a:t>•  Causa raíz: la condición de fondo que permitió todo (p. ej. "no había filtrado de adjuntos ni bloqueo de macros"). Característica: al corregirla, se previenen incidentes futuros.</a:t>
-            </a:r>
-          </a:p>
-          <a:p>
-            <a:pPr>
-              <a:spcAft>
-                <a:spcPts val="600"/>
-              </a:spcAft>
-            </a:pPr>
-            <a:r>
-              <a:rPr sz="1500">
-                <a:solidFill>
-                  <a:srgbClr val="22282E"/>
-                </a:solidFill>
-              </a:rPr>
-              <a:t>•  Causa contribuyente: factor que agravó o facilitó. Característica: no es la raíz, pero importa.</a:t>
-            </a:r>
-          </a:p>
-          <a:p>
-            <a:pPr>
-              <a:spcAft>
-                <a:spcPts val="600"/>
-              </a:spcAft>
-            </a:pPr>
-            <a:r>
-              <a:rPr sz="1500">
-                <a:solidFill>
-                  <a:srgbClr val="22282E"/>
-                </a:solidFill>
-              </a:rPr>
-              <a:t>•  5 Porqués: preguntar "¿por qué?" iterativamente hasta la raíz. Característica: simple, ideal para causas lineales.</a:t>
-            </a:r>
-          </a:p>
-          <a:p>
-            <a:pPr>
-              <a:spcAft>
-                <a:spcPts val="600"/>
-              </a:spcAft>
-            </a:pPr>
-            <a:r>
-              <a:rPr sz="1500">
-                <a:solidFill>
-                  <a:srgbClr val="22282E"/>
-                </a:solidFill>
-              </a:rPr>
-              <a:t>•  Ishikawa (espina de pescado): agrupa causas por categorías (personas, proceso, tecnología…). Característica: útil para causas múltiples.</a:t>
-            </a:r>
-          </a:p>
-          <a:p>
-            <a:pPr>
-              <a:spcAft>
-                <a:spcPts val="600"/>
-              </a:spcAft>
-            </a:pPr>
-            <a:r>
-              <a:rPr sz="1500">
-                <a:solidFill>
-                  <a:srgbClr val="22282E"/>
-                </a:solidFill>
-              </a:rPr>
-              <a:t>•  Blameless post-mortem: análisis sin culpar individuos. Característica: fomenta honestidad y aprendizaje.</a:t>
-            </a:r>
-          </a:p>
-          <a:p>
-            <a:pPr>
-              <a:spcAft>
-                <a:spcPts val="600"/>
-              </a:spcAft>
-            </a:pPr>
-            <a:r>
-              <a:rPr sz="1500">
-                <a:solidFill>
-                  <a:srgbClr val="22282E"/>
-                </a:solidFill>
-              </a:rPr>
-              <a:t>•  MTTD/MTTR: tiempo medio de detección/respuesta. Característica: métricas de mejora del programa.</a:t>
+              <a:t>•  Causa raíz no significa encontrar una única persona o vulnerabilidad. Un incidente emerge de condiciones técnicas y organizativas: exposición, identidad, control preventivo, telemetría, decisión y…</a:t>
+            </a:r>
+          </a:p>
+          <a:p>
+            <a:pPr>
+              <a:spcAft>
+                <a:spcPts val="600"/>
+              </a:spcAft>
+            </a:pPr>
+            <a:r>
+              <a:rPr sz="1500">
+                <a:solidFill>
+                  <a:srgbClr val="22282E"/>
+                </a:solidFill>
+              </a:rPr>
+              <a:t>•  Los «5 porqués» ayudan si se sustentan en hechos y no se fuerzan hasta una respuesta conveniente. Un diagrama causal permite múltiples contribuyentes y barreras fallidas. Se separan causa, factor…</a:t>
+            </a:r>
+          </a:p>
+          <a:p>
+            <a:pPr>
+              <a:spcAft>
+                <a:spcPts val="600"/>
+              </a:spcAft>
+            </a:pPr>
+            <a:r>
+              <a:rPr sz="1500">
+                <a:solidFill>
+                  <a:srgbClr val="22282E"/>
+                </a:solidFill>
+              </a:rPr>
+              <a:t>•  Una timeline responde principalmente cuándo y en qué orden; el RCA pregunta qué condiciones hicieron posible el impacto. Que una persona abriera un adjunto puede ser un hecho próximo, pero el…</a:t>
+            </a:r>
+          </a:p>
+          <a:p>
+            <a:pPr>
+              <a:spcAft>
+                <a:spcPts val="600"/>
+              </a:spcAft>
+            </a:pPr>
+            <a:r>
+              <a:rPr sz="1500">
+                <a:solidFill>
+                  <a:srgbClr val="22282E"/>
+                </a:solidFill>
+              </a:rPr>
+              <a:t>•  No toda condición es «la raíz». Se distingue disparador, causa próxima, factor contribuyente, condición sistémica e impacto. Varias ramas pueden converger. Esta precisión evita una cadena artificial…</a:t>
+            </a:r>
+          </a:p>
+          <a:p>
+            <a:pPr>
+              <a:spcAft>
+                <a:spcPts val="600"/>
+              </a:spcAft>
+            </a:pPr>
+            <a:r>
+              <a:rPr sz="1500">
+                <a:solidFill>
+                  <a:srgbClr val="22282E"/>
+                </a:solidFill>
+              </a:rPr>
+              <a:t>•  Los 5 Porqués funcionan bien para una cadena acotada y se detienen cuando falta evidencia o se sale del control de la organización. Ishikawa ayuda a explorar personas, proceso, tecnología, entorno y…</a:t>
+            </a:r>
+          </a:p>
+          <a:p>
+            <a:pPr>
+              <a:spcAft>
+                <a:spcPts val="600"/>
+              </a:spcAft>
+            </a:pPr>
+            <a:r>
+              <a:rPr sz="1500">
+                <a:solidFill>
+                  <a:srgbClr val="22282E"/>
+                </a:solidFill>
+              </a:rPr>
+              <a:t>•  Un postmortem sin culpa no elimina responsabilidad profesional. Busca entender decisiones dentro de la información, incentivos y herramientas disponibles, y separa conducta deliberada de error…</a:t>
+            </a:r>
+          </a:p>
+          <a:p>
+            <a:pPr>
+              <a:spcAft>
+                <a:spcPts val="600"/>
+              </a:spcAft>
+            </a:pPr>
+            <a:r>
+              <a:rPr sz="1500">
+                <a:solidFill>
+                  <a:srgbClr val="22282E"/>
+                </a:solidFill>
+              </a:rPr>
+              <a:t>•  Cada acción se vincula a una causa, tiene dueño, plazo, prioridad y prueba de eficacia. «Implementar MFA resistente al phishing para administradores y simular un inicio con credencial robada» es…</a:t>
             </a:r>
           </a:p>
         </p:txBody>
@@ -4271,7 +4917,7 @@
                   <a:srgbClr val="0B3D2E"/>
                 </a:solidFill>
               </a:rPr>
-              <a:t>🧰 Herramientas y preparación</a:t>
+              <a:t>📔 Glosario</a:t>
             </a:r>
           </a:p>
         </p:txBody>
@@ -4309,37 +4955,97 @@
                   <a:srgbClr val="22282E"/>
                 </a:solidFill>
               </a:rPr>
-              <a:t>•  Metodologías: plantilla de 5 Porqués, diagrama de Ishikawa, plantilla de post-mortem blameless.</a:t>
-            </a:r>
-          </a:p>
-          <a:p>
-            <a:pPr>
-              <a:spcAft>
-                <a:spcPts val="600"/>
-              </a:spcAft>
-            </a:pPr>
-            <a:r>
-              <a:rPr sz="1500">
-                <a:solidFill>
-                  <a:srgbClr val="22282E"/>
-                </a:solidFill>
-              </a:rPr>
-              <a:t>•  Insumos: la timeline (clase 209), los hallazgos forenses y el mapeo ATT&amp;CK del incidente.</a:t>
-            </a:r>
-          </a:p>
-          <a:p>
-            <a:pPr>
-              <a:spcAft>
-                <a:spcPts val="600"/>
-              </a:spcAft>
-            </a:pPr>
-            <a:r>
-              <a:rPr sz="1500">
-                <a:solidFill>
-                  <a:srgbClr val="22282E"/>
-                </a:solidFill>
-              </a:rPr>
-              <a:t>•  Ejercicio aplicado: análisis, no herramientas ofensivas.</a:t>
+              <a:t>•  Causa raíz: condición cuya corrección reduce recurrencia significativa.</a:t>
+            </a:r>
+          </a:p>
+          <a:p>
+            <a:pPr>
+              <a:spcAft>
+                <a:spcPts val="600"/>
+              </a:spcAft>
+            </a:pPr>
+            <a:r>
+              <a:rPr sz="1500">
+                <a:solidFill>
+                  <a:srgbClr val="22282E"/>
+                </a:solidFill>
+              </a:rPr>
+              <a:t>•  Factor contribuyente: condición que aumentó probabilidad o impacto.</a:t>
+            </a:r>
+          </a:p>
+          <a:p>
+            <a:pPr>
+              <a:spcAft>
+                <a:spcPts val="600"/>
+              </a:spcAft>
+            </a:pPr>
+            <a:r>
+              <a:rPr sz="1500">
+                <a:solidFill>
+                  <a:srgbClr val="22282E"/>
+                </a:solidFill>
+              </a:rPr>
+              <a:t>•  Síntoma: manifestación observable del problema.</a:t>
+            </a:r>
+          </a:p>
+          <a:p>
+            <a:pPr>
+              <a:spcAft>
+                <a:spcPts val="600"/>
+              </a:spcAft>
+            </a:pPr>
+            <a:r>
+              <a:rPr sz="1500">
+                <a:solidFill>
+                  <a:srgbClr val="22282E"/>
+                </a:solidFill>
+              </a:rPr>
+              <a:t>•  5 Whys: técnica iterativa de preguntas causales.</a:t>
+            </a:r>
+          </a:p>
+          <a:p>
+            <a:pPr>
+              <a:spcAft>
+                <a:spcPts val="600"/>
+              </a:spcAft>
+            </a:pPr>
+            <a:r>
+              <a:rPr sz="1500">
+                <a:solidFill>
+                  <a:srgbClr val="22282E"/>
+                </a:solidFill>
+              </a:rPr>
+              <a:t>•  Causal graph: relaciones entre condiciones y resultado.</a:t>
+            </a:r>
+          </a:p>
+          <a:p>
+            <a:pPr>
+              <a:spcAft>
+                <a:spcPts val="600"/>
+              </a:spcAft>
+            </a:pPr>
+            <a:r>
+              <a:rPr sz="1500">
+                <a:solidFill>
+                  <a:srgbClr val="22282E"/>
+                </a:solidFill>
+              </a:rPr>
+              <a:t>•  Control fallido: barrera inexistente, ineficaz o eludida.</a:t>
+            </a:r>
+          </a:p>
+          <a:p>
+            <a:pPr>
+              <a:spcAft>
+                <a:spcPts val="600"/>
+              </a:spcAft>
+            </a:pPr>
+            <a:r>
+              <a:rPr sz="1500">
+                <a:solidFill>
+                  <a:srgbClr val="22282E"/>
+                </a:solidFill>
+              </a:rPr>
+              <a:t>•  Acción correctiva: cambio con dueño y validación.</a:t>
             </a:r>
           </a:p>
         </p:txBody>
@@ -4390,7 +5096,7 @@
                   <a:srgbClr val="0B3D2E"/>
                 </a:solidFill>
               </a:rPr>
-              <a:t>🧪 Laboratorio guiado</a:t>
+              <a:t>📖 Definiciones y características</a:t>
             </a:r>
           </a:p>
         </p:txBody>
@@ -4428,97 +5134,97 @@
                   <a:srgbClr val="22282E"/>
                 </a:solidFill>
               </a:rPr>
-              <a:t>•  Reúne los hechos: timeline, IOCs, artefactos y el mapeo ATT&amp;CK del ataque.</a:t>
-            </a:r>
-          </a:p>
-          <a:p>
-            <a:pPr>
-              <a:spcAft>
-                <a:spcPts val="600"/>
-              </a:spcAft>
-            </a:pPr>
-            <a:r>
-              <a:rPr sz="1500">
-                <a:solidFill>
-                  <a:srgbClr val="22282E"/>
-                </a:solidFill>
-              </a:rPr>
-              <a:t>•  Aplica los 5 Porqués partiendo del impacto. Ejemplo:</a:t>
-            </a:r>
-          </a:p>
-          <a:p>
-            <a:pPr>
-              <a:spcAft>
-                <a:spcPts val="600"/>
-              </a:spcAft>
-            </a:pPr>
-            <a:r>
-              <a:rPr sz="1500">
-                <a:solidFill>
-                  <a:srgbClr val="22282E"/>
-                </a:solidFill>
-              </a:rPr>
-              <a:t>•  ¿Por qué se cifraron los archivos? → Se ejecutó ransomware.</a:t>
-            </a:r>
-          </a:p>
-          <a:p>
-            <a:pPr>
-              <a:spcAft>
-                <a:spcPts val="600"/>
-              </a:spcAft>
-            </a:pPr>
-            <a:r>
-              <a:rPr sz="1500">
-                <a:solidFill>
-                  <a:srgbClr val="22282E"/>
-                </a:solidFill>
-              </a:rPr>
-              <a:t>•  ¿Por qué se ejecutó? → Un usuario abrió un adjunto con macro.</a:t>
-            </a:r>
-          </a:p>
-          <a:p>
-            <a:pPr>
-              <a:spcAft>
-                <a:spcPts val="600"/>
-              </a:spcAft>
-            </a:pPr>
-            <a:r>
-              <a:rPr sz="1500">
-                <a:solidFill>
-                  <a:srgbClr val="22282E"/>
-                </a:solidFill>
-              </a:rPr>
-              <a:t>•  ¿Por qué la macro corrió? → Las macros no estaban bloqueadas por política.</a:t>
-            </a:r>
-          </a:p>
-          <a:p>
-            <a:pPr>
-              <a:spcAft>
-                <a:spcPts val="600"/>
-              </a:spcAft>
-            </a:pPr>
-            <a:r>
-              <a:rPr sz="1500">
-                <a:solidFill>
-                  <a:srgbClr val="22282E"/>
-                </a:solidFill>
-              </a:rPr>
-              <a:t>•  ¿Por qué llegó el correo? → El gateway no filtró el adjunto.</a:t>
-            </a:r>
-          </a:p>
-          <a:p>
-            <a:pPr>
-              <a:spcAft>
-                <a:spcPts val="600"/>
-              </a:spcAft>
-            </a:pPr>
-            <a:r>
-              <a:rPr sz="1500">
-                <a:solidFill>
-                  <a:srgbClr val="22282E"/>
-                </a:solidFill>
-              </a:rPr>
-              <a:t>•  ¿Por qué escaló a red? → La cuenta tenía privilegios excesivos.</a:t>
+              <a:t>•  Causa próxima: el evento inmediato que produjo el daño (p. ej. "se ejecutó el macro"). Característica: visible pero superficial.</a:t>
+            </a:r>
+          </a:p>
+          <a:p>
+            <a:pPr>
+              <a:spcAft>
+                <a:spcPts val="600"/>
+              </a:spcAft>
+            </a:pPr>
+            <a:r>
+              <a:rPr sz="1500">
+                <a:solidFill>
+                  <a:srgbClr val="22282E"/>
+                </a:solidFill>
+              </a:rPr>
+              <a:t>•  Causa raíz: condición sistémica cuya corrección reduce de forma demostrable la probabilidad o impacto de recurrencia. Característica: puede coexistir con otras causas y no asegura prevención absoluta.</a:t>
+            </a:r>
+          </a:p>
+          <a:p>
+            <a:pPr>
+              <a:spcAft>
+                <a:spcPts val="600"/>
+              </a:spcAft>
+            </a:pPr>
+            <a:r>
+              <a:rPr sz="1500">
+                <a:solidFill>
+                  <a:srgbClr val="22282E"/>
+                </a:solidFill>
+              </a:rPr>
+              <a:t>•  Causa contribuyente: factor que agravó o facilitó. Característica: no es la raíz, pero importa.</a:t>
+            </a:r>
+          </a:p>
+          <a:p>
+            <a:pPr>
+              <a:spcAft>
+                <a:spcPts val="600"/>
+              </a:spcAft>
+            </a:pPr>
+            <a:r>
+              <a:rPr sz="1500">
+                <a:solidFill>
+                  <a:srgbClr val="22282E"/>
+                </a:solidFill>
+              </a:rPr>
+              <a:t>•  5 Porqués: preguntar por condiciones causales sucesivas y respaldarlas con evidencia. Característica: útil para cadenas acotadas; puede simplificar en exceso sistemas complejos.</a:t>
+            </a:r>
+          </a:p>
+          <a:p>
+            <a:pPr>
+              <a:spcAft>
+                <a:spcPts val="600"/>
+              </a:spcAft>
+            </a:pPr>
+            <a:r>
+              <a:rPr sz="1500">
+                <a:solidFill>
+                  <a:srgbClr val="22282E"/>
+                </a:solidFill>
+              </a:rPr>
+              <a:t>•  Ishikawa (espina de pescado): agrupa causas por categorías (personas, proceso, tecnología…). Característica: útil para causas múltiples.</a:t>
+            </a:r>
+          </a:p>
+          <a:p>
+            <a:pPr>
+              <a:spcAft>
+                <a:spcPts val="600"/>
+              </a:spcAft>
+            </a:pPr>
+            <a:r>
+              <a:rPr sz="1500">
+                <a:solidFill>
+                  <a:srgbClr val="22282E"/>
+                </a:solidFill>
+              </a:rPr>
+              <a:t>•  Blameless post-mortem: análisis sin culpar individuos. Característica: fomenta honestidad y aprendizaje.</a:t>
+            </a:r>
+          </a:p>
+          <a:p>
+            <a:pPr>
+              <a:spcAft>
+                <a:spcPts val="600"/>
+              </a:spcAft>
+            </a:pPr>
+            <a:r>
+              <a:rPr sz="1500">
+                <a:solidFill>
+                  <a:srgbClr val="22282E"/>
+                </a:solidFill>
+              </a:rPr>
+              <a:t>•  MTTD/MTTR: medidas de tiempo de detección y respuesta bajo una definición explícita. Característica: orientan tendencias, pero son sensibles a población, severidad y sesgo de detección.</a:t>
             </a:r>
           </a:p>
         </p:txBody>
@@ -4569,7 +5275,7 @@
                   <a:srgbClr val="0B3D2E"/>
                 </a:solidFill>
               </a:rPr>
-              <a:t>✍️ Ejercicios</a:t>
+              <a:t>🔍 Caso razonado — por qué «el usuario hizo clic» no cierra el análisis</a:t>
             </a:r>
           </a:p>
         </p:txBody>
@@ -4607,82 +5313,22 @@
                   <a:srgbClr val="22282E"/>
                 </a:solidFill>
               </a:rPr>
-              <a:t>•  Aplica los 5 Porqués a un caso de phishing.</a:t>
-            </a:r>
-          </a:p>
-          <a:p>
-            <a:pPr>
-              <a:spcAft>
-                <a:spcPts val="600"/>
-              </a:spcAft>
-            </a:pPr>
-            <a:r>
-              <a:rPr sz="1500">
-                <a:solidFill>
-                  <a:srgbClr val="22282E"/>
-                </a:solidFill>
-              </a:rPr>
-              <a:t>•  Construye un Ishikawa con cuatro categorías de causa.</a:t>
-            </a:r>
-          </a:p>
-          <a:p>
-            <a:pPr>
-              <a:spcAft>
-                <a:spcPts val="600"/>
-              </a:spcAft>
-            </a:pPr>
-            <a:r>
-              <a:rPr sz="1500">
-                <a:solidFill>
-                  <a:srgbClr val="22282E"/>
-                </a:solidFill>
-              </a:rPr>
-              <a:t>•  Distingue causa próxima y raíz en tres incidentes distintos.</a:t>
-            </a:r>
-          </a:p>
-          <a:p>
-            <a:pPr>
-              <a:spcAft>
-                <a:spcPts val="600"/>
-              </a:spcAft>
-            </a:pPr>
-            <a:r>
-              <a:rPr sz="1500">
-                <a:solidFill>
-                  <a:srgbClr val="22282E"/>
-                </a:solidFill>
-              </a:rPr>
-              <a:t>•  Formula tres acciones correctivas verificables.</a:t>
-            </a:r>
-          </a:p>
-          <a:p>
-            <a:pPr>
-              <a:spcAft>
-                <a:spcPts val="600"/>
-              </a:spcAft>
-            </a:pPr>
-            <a:r>
-              <a:rPr sz="1500">
-                <a:solidFill>
-                  <a:srgbClr val="22282E"/>
-                </a:solidFill>
-              </a:rPr>
-              <a:t>•  Calcula MTTD y MTTR de una timeline dada.</a:t>
-            </a:r>
-          </a:p>
-          <a:p>
-            <a:pPr>
-              <a:spcAft>
-                <a:spcPts val="600"/>
-              </a:spcAft>
-            </a:pPr>
-            <a:r>
-              <a:rPr sz="1500">
-                <a:solidFill>
-                  <a:srgbClr val="22282E"/>
-                </a:solidFill>
-              </a:rPr>
-              <a:t>•  Reescribe un post-mortem con culpas en versión blameless.</a:t>
+              <a:t>•  Un adjunto ejecuta código y roba un token administrativo. Culpar el clic propone capacitar otra vez, pero no explica por qué el adjunto llegó, por qué pudo ejecutar, por qué la cuenta tenía…</a:t>
+            </a:r>
+          </a:p>
+          <a:p>
+            <a:pPr>
+              <a:spcAft>
+                <a:spcPts val="600"/>
+              </a:spcAft>
+            </a:pPr>
+            <a:r>
+              <a:rPr sz="1500">
+                <a:solidFill>
+                  <a:srgbClr val="22282E"/>
+                </a:solidFill>
+              </a:rPr>
+              <a:t>•  Las acciones resultantes son distintas: bloquear el tipo de contenido mediante una prueba reproducible, reducir privilegio permanente, aplicar autenticación resistente al phishing y alertar sobre uso…</a:t>
             </a:r>
           </a:p>
         </p:txBody>
@@ -4733,7 +5379,7 @@
                   <a:srgbClr val="0B3D2E"/>
                 </a:solidFill>
               </a:rPr>
-              <a:t>📝 Reto verificable</a:t>
+              <a:t>✅ Criterio de dominio</a:t>
             </a:r>
           </a:p>
         </p:txBody>
@@ -4771,22 +5417,7 @@
                   <a:srgbClr val="22282E"/>
                 </a:solidFill>
               </a:rPr>
-              <a:t>•  Realiza el análisis de causa raíz completo de un incidente que investigaste, entregando el árbol de 5 Porqués, el Ishikawa, la kill chain, y al menos tres acciones correctivas que ataquen causas raíz (no síntomas), cada una con criterio de verificación.</a:t>
-            </a:r>
-          </a:p>
-          <a:p>
-            <a:pPr>
-              <a:spcAft>
-                <a:spcPts val="600"/>
-              </a:spcAft>
-            </a:pPr>
-            <a:r>
-              <a:rPr sz="1500">
-                <a:solidFill>
-                  <a:srgbClr val="22282E"/>
-                </a:solidFill>
-              </a:rPr>
-              <a:t>•  Criterio de aceptación: cada acción correctiva ataca una causa raíz identificada (no un síntoma), tiene responsable, fecha y una forma objetiva de verificar que se implementó. El post-mortem no señala a ningún individuo.</a:t>
+              <a:t>•  Dominas la clase cuando transformas una timeline en un modelo causal con múltiples contribuyentes, detienes un método cuando falta evidencia, evitas atribuir la raíz a una persona por comodidad y…</a:t>
             </a:r>
           </a:p>
         </p:txBody>
